--- a/Machine Learning Capstone/IBM Machine Learning Capstone - Recommendation System POC.pptx
+++ b/Machine Learning Capstone/IBM Machine Learning Capstone - Recommendation System POC.pptx
@@ -196,7 +196,7 @@
 <file path=ppt/revisionInfo.xml><?xml version="1.0" encoding="utf-8"?>
 <p1510:revInfo xmlns:a="http://schemas.openxmlformats.org/drawingml/2006/main" xmlns:r="http://schemas.openxmlformats.org/officeDocument/2006/relationships" xmlns:p1510="http://schemas.microsoft.com/office/powerpoint/2015/10/main">
   <p1510:revLst>
-    <p1510:client id="{AD6344B4-B012-190C-FF3D-E98AC32BACD0}" v="2891" dt="2026-04-08T08:10:44.485"/>
+    <p1510:client id="{AD6344B4-B012-190C-FF3D-E98AC32BACD0}" v="3366" dt="2026-04-08T09:22:46.179"/>
   </p1510:revLst>
 </p1510:revInfo>
 </file>
@@ -972,7 +972,7 @@
           <a:p>
             <a:fld id="{EEBDA0E2-FEBD-4B65-8F16-724CF984F377}" type="slidenum">
               <a:rPr lang="en-US" smtClean="0"/>
-              <a:t>23</a:t>
+              <a:t>24</a:t>
             </a:fld>
             <a:endParaRPr lang="en-US"/>
           </a:p>
@@ -1047,6 +1047,7 @@
   <p:clrMapOvr>
     <a:masterClrMapping/>
   </p:clrMapOvr>
+  <p:hf hdr="0" ftr="0" dt="0"/>
 </p:sldLayout>
 </file>
 
@@ -1277,6 +1278,7 @@
   <p:clrMapOvr>
     <a:masterClrMapping/>
   </p:clrMapOvr>
+  <p:hf hdr="0" ftr="0" dt="0"/>
 </p:sldLayout>
 </file>
 
@@ -1507,6 +1509,7 @@
   <p:clrMapOvr>
     <a:masterClrMapping/>
   </p:clrMapOvr>
+  <p:hf hdr="0" ftr="0" dt="0"/>
 </p:sldLayout>
 </file>
 
@@ -1737,6 +1740,7 @@
   <p:clrMapOvr>
     <a:masterClrMapping/>
   </p:clrMapOvr>
+  <p:hf hdr="0" ftr="0" dt="0"/>
 </p:sldLayout>
 </file>
 
@@ -2034,6 +2038,7 @@
   <p:clrMapOvr>
     <a:masterClrMapping/>
   </p:clrMapOvr>
+  <p:hf hdr="0" ftr="0" dt="0"/>
 </p:sldLayout>
 </file>
 
@@ -2329,6 +2334,7 @@
   <p:clrMapOvr>
     <a:masterClrMapping/>
   </p:clrMapOvr>
+  <p:hf hdr="0" ftr="0" dt="0"/>
 </p:sldLayout>
 </file>
 
@@ -2772,6 +2778,7 @@
   <p:clrMapOvr>
     <a:masterClrMapping/>
   </p:clrMapOvr>
+  <p:hf hdr="0" ftr="0" dt="0"/>
 </p:sldLayout>
 </file>
 
@@ -2937,6 +2944,7 @@
   <p:clrMapOvr>
     <a:masterClrMapping/>
   </p:clrMapOvr>
+  <p:hf hdr="0" ftr="0" dt="0"/>
 </p:sldLayout>
 </file>
 
@@ -3066,6 +3074,7 @@
   <p:clrMapOvr>
     <a:masterClrMapping/>
   </p:clrMapOvr>
+  <p:hf hdr="0" ftr="0" dt="0"/>
 </p:sldLayout>
 </file>
 
@@ -3402,6 +3411,7 @@
   <p:clrMapOvr>
     <a:masterClrMapping/>
   </p:clrMapOvr>
+  <p:hf hdr="0" ftr="0" dt="0"/>
 </p:sldLayout>
 </file>
 
@@ -3715,6 +3725,7 @@
   <p:clrMapOvr>
     <a:masterClrMapping/>
   </p:clrMapOvr>
+  <p:hf hdr="0" ftr="0" dt="0"/>
 </p:sldLayout>
 </file>
 
@@ -3813,6 +3824,7 @@
     <p:sldLayoutId id="2147483692" r:id="rId10"/>
     <p:sldLayoutId id="2147483693" r:id="rId11"/>
   </p:sldLayoutIdLst>
+  <p:hf hdr="0" ftr="0" dt="0"/>
   <p:txStyles>
     <p:titleStyle>
       <a:lvl1pPr algn="l" defTabSz="914400" rtl="0" eaLnBrk="1" latinLnBrk="0" hangingPunct="1">
@@ -4496,6 +4508,49 @@
           </a:prstGeom>
         </p:spPr>
       </p:pic>
+      <p:sp>
+        <p:nvSpPr>
+          <p:cNvPr id="5" name="Slide Number Placeholder 4">
+            <a:extLst>
+              <a:ext uri="{FF2B5EF4-FFF2-40B4-BE49-F238E27FC236}">
+                <a16:creationId xmlns:a16="http://schemas.microsoft.com/office/drawing/2014/main" id="{F89B9AEC-A4C0-13C0-FC12-A0F010282953}"/>
+              </a:ext>
+            </a:extLst>
+          </p:cNvPr>
+          <p:cNvSpPr>
+            <a:spLocks noGrp="1"/>
+          </p:cNvSpPr>
+          <p:nvPr>
+            <p:ph type="sldNum" sz="quarter" idx="12"/>
+          </p:nvPr>
+        </p:nvSpPr>
+        <p:spPr/>
+        <p:txBody>
+          <a:bodyPr/>
+          <a:lstStyle/>
+          <a:p>
+            <a:fld id="{A190C97C-0095-2443-AC12-FA4CBA4ACD4D}" type="slidenum">
+              <a:rPr lang="en-US" dirty="0" smtClean="0">
+                <a:solidFill>
+                  <a:schemeClr val="accent4">
+                    <a:lumMod val="76000"/>
+                  </a:schemeClr>
+                </a:solidFill>
+                <a:latin typeface="Abadi"/>
+              </a:rPr>
+              <a:t>1</a:t>
+            </a:fld>
+            <a:endParaRPr lang="en-US" dirty="0">
+              <a:solidFill>
+                <a:schemeClr val="accent4">
+                  <a:lumMod val="76000"/>
+                </a:schemeClr>
+              </a:solidFill>
+              <a:latin typeface="Abadi"/>
+            </a:endParaRPr>
+          </a:p>
+        </p:txBody>
+      </p:sp>
     </p:spTree>
     <p:extLst>
       <p:ext uri="{BB962C8B-B14F-4D97-AF65-F5344CB8AC3E}">
@@ -4828,6 +4883,49 @@
           </a:prstGeom>
         </p:spPr>
       </p:pic>
+      <p:sp>
+        <p:nvSpPr>
+          <p:cNvPr id="2" name="Slide Number Placeholder 1">
+            <a:extLst>
+              <a:ext uri="{FF2B5EF4-FFF2-40B4-BE49-F238E27FC236}">
+                <a16:creationId xmlns:a16="http://schemas.microsoft.com/office/drawing/2014/main" id="{621E6831-38B8-EEAB-3E4E-460997597269}"/>
+              </a:ext>
+            </a:extLst>
+          </p:cNvPr>
+          <p:cNvSpPr>
+            <a:spLocks noGrp="1"/>
+          </p:cNvSpPr>
+          <p:nvPr>
+            <p:ph type="sldNum" sz="quarter" idx="12"/>
+          </p:nvPr>
+        </p:nvSpPr>
+        <p:spPr/>
+        <p:txBody>
+          <a:bodyPr/>
+          <a:lstStyle/>
+          <a:p>
+            <a:fld id="{A190C97C-0095-2443-AC12-FA4CBA4ACD4D}" type="slidenum">
+              <a:rPr lang="en-US" dirty="0" smtClean="0">
+                <a:solidFill>
+                  <a:schemeClr val="accent4">
+                    <a:lumMod val="76000"/>
+                  </a:schemeClr>
+                </a:solidFill>
+                <a:latin typeface="Abadi"/>
+              </a:rPr>
+              <a:t>10</a:t>
+            </a:fld>
+            <a:endParaRPr lang="en-US" dirty="0">
+              <a:solidFill>
+                <a:schemeClr val="accent4">
+                  <a:lumMod val="76000"/>
+                </a:schemeClr>
+              </a:solidFill>
+              <a:latin typeface="Abadi"/>
+            </a:endParaRPr>
+          </a:p>
+        </p:txBody>
+      </p:sp>
     </p:spTree>
     <p:extLst>
       <p:ext uri="{BB962C8B-B14F-4D97-AF65-F5344CB8AC3E}">
@@ -5685,6 +5783,49 @@
           </a:prstGeom>
         </p:spPr>
       </p:pic>
+      <p:sp>
+        <p:nvSpPr>
+          <p:cNvPr id="3" name="Slide Number Placeholder 2">
+            <a:extLst>
+              <a:ext uri="{FF2B5EF4-FFF2-40B4-BE49-F238E27FC236}">
+                <a16:creationId xmlns:a16="http://schemas.microsoft.com/office/drawing/2014/main" id="{BC36999B-7986-E72C-8147-623524C4D84B}"/>
+              </a:ext>
+            </a:extLst>
+          </p:cNvPr>
+          <p:cNvSpPr>
+            <a:spLocks noGrp="1"/>
+          </p:cNvSpPr>
+          <p:nvPr>
+            <p:ph type="sldNum" sz="quarter" idx="12"/>
+          </p:nvPr>
+        </p:nvSpPr>
+        <p:spPr/>
+        <p:txBody>
+          <a:bodyPr/>
+          <a:lstStyle/>
+          <a:p>
+            <a:fld id="{A190C97C-0095-2443-AC12-FA4CBA4ACD4D}" type="slidenum">
+              <a:rPr lang="en-US" dirty="0" smtClean="0">
+                <a:solidFill>
+                  <a:schemeClr val="accent4">
+                    <a:lumMod val="76000"/>
+                  </a:schemeClr>
+                </a:solidFill>
+                <a:latin typeface="Abadi"/>
+              </a:rPr>
+              <a:t>11</a:t>
+            </a:fld>
+            <a:endParaRPr lang="en-US" dirty="0">
+              <a:solidFill>
+                <a:schemeClr val="accent4">
+                  <a:lumMod val="76000"/>
+                </a:schemeClr>
+              </a:solidFill>
+              <a:latin typeface="Abadi"/>
+            </a:endParaRPr>
+          </a:p>
+        </p:txBody>
+      </p:sp>
     </p:spTree>
     <p:extLst>
       <p:ext uri="{BB962C8B-B14F-4D97-AF65-F5344CB8AC3E}">
@@ -6020,6 +6161,49 @@
           </a:prstGeom>
         </p:spPr>
       </p:pic>
+      <p:sp>
+        <p:nvSpPr>
+          <p:cNvPr id="2" name="Slide Number Placeholder 1">
+            <a:extLst>
+              <a:ext uri="{FF2B5EF4-FFF2-40B4-BE49-F238E27FC236}">
+                <a16:creationId xmlns:a16="http://schemas.microsoft.com/office/drawing/2014/main" id="{590A6B68-00E8-C0FA-8043-6C15BBE528EE}"/>
+              </a:ext>
+            </a:extLst>
+          </p:cNvPr>
+          <p:cNvSpPr>
+            <a:spLocks noGrp="1"/>
+          </p:cNvSpPr>
+          <p:nvPr>
+            <p:ph type="sldNum" sz="quarter" idx="12"/>
+          </p:nvPr>
+        </p:nvSpPr>
+        <p:spPr/>
+        <p:txBody>
+          <a:bodyPr/>
+          <a:lstStyle/>
+          <a:p>
+            <a:fld id="{A190C97C-0095-2443-AC12-FA4CBA4ACD4D}" type="slidenum">
+              <a:rPr lang="en-US" dirty="0" smtClean="0">
+                <a:solidFill>
+                  <a:schemeClr val="accent4">
+                    <a:lumMod val="76000"/>
+                  </a:schemeClr>
+                </a:solidFill>
+                <a:latin typeface="Abadi"/>
+              </a:rPr>
+              <a:t>12</a:t>
+            </a:fld>
+            <a:endParaRPr lang="en-US" dirty="0">
+              <a:solidFill>
+                <a:schemeClr val="accent4">
+                  <a:lumMod val="76000"/>
+                </a:schemeClr>
+              </a:solidFill>
+              <a:latin typeface="Abadi"/>
+            </a:endParaRPr>
+          </a:p>
+        </p:txBody>
+      </p:sp>
     </p:spTree>
     <p:extLst>
       <p:ext uri="{BB962C8B-B14F-4D97-AF65-F5344CB8AC3E}">
@@ -6852,6 +7036,49 @@
           </a:prstGeom>
         </p:spPr>
       </p:pic>
+      <p:sp>
+        <p:nvSpPr>
+          <p:cNvPr id="2" name="Slide Number Placeholder 1">
+            <a:extLst>
+              <a:ext uri="{FF2B5EF4-FFF2-40B4-BE49-F238E27FC236}">
+                <a16:creationId xmlns:a16="http://schemas.microsoft.com/office/drawing/2014/main" id="{492A52B1-C4EE-021B-3157-FD1191FCFA10}"/>
+              </a:ext>
+            </a:extLst>
+          </p:cNvPr>
+          <p:cNvSpPr>
+            <a:spLocks noGrp="1"/>
+          </p:cNvSpPr>
+          <p:nvPr>
+            <p:ph type="sldNum" sz="quarter" idx="12"/>
+          </p:nvPr>
+        </p:nvSpPr>
+        <p:spPr/>
+        <p:txBody>
+          <a:bodyPr/>
+          <a:lstStyle/>
+          <a:p>
+            <a:fld id="{A190C97C-0095-2443-AC12-FA4CBA4ACD4D}" type="slidenum">
+              <a:rPr lang="en-US" dirty="0" smtClean="0">
+                <a:solidFill>
+                  <a:schemeClr val="accent4">
+                    <a:lumMod val="76000"/>
+                  </a:schemeClr>
+                </a:solidFill>
+                <a:latin typeface="Abadi"/>
+              </a:rPr>
+              <a:t>13</a:t>
+            </a:fld>
+            <a:endParaRPr lang="en-US" dirty="0">
+              <a:solidFill>
+                <a:schemeClr val="accent4">
+                  <a:lumMod val="76000"/>
+                </a:schemeClr>
+              </a:solidFill>
+              <a:latin typeface="Abadi"/>
+            </a:endParaRPr>
+          </a:p>
+        </p:txBody>
+      </p:sp>
     </p:spTree>
     <p:extLst>
       <p:ext uri="{BB962C8B-B14F-4D97-AF65-F5344CB8AC3E}">
@@ -7175,6 +7402,49 @@
           </a:prstGeom>
         </p:spPr>
       </p:pic>
+      <p:sp>
+        <p:nvSpPr>
+          <p:cNvPr id="2" name="Slide Number Placeholder 1">
+            <a:extLst>
+              <a:ext uri="{FF2B5EF4-FFF2-40B4-BE49-F238E27FC236}">
+                <a16:creationId xmlns:a16="http://schemas.microsoft.com/office/drawing/2014/main" id="{D47FC0C7-D6B5-2E34-80E9-80668C4C1A84}"/>
+              </a:ext>
+            </a:extLst>
+          </p:cNvPr>
+          <p:cNvSpPr>
+            <a:spLocks noGrp="1"/>
+          </p:cNvSpPr>
+          <p:nvPr>
+            <p:ph type="sldNum" sz="quarter" idx="12"/>
+          </p:nvPr>
+        </p:nvSpPr>
+        <p:spPr/>
+        <p:txBody>
+          <a:bodyPr/>
+          <a:lstStyle/>
+          <a:p>
+            <a:fld id="{A190C97C-0095-2443-AC12-FA4CBA4ACD4D}" type="slidenum">
+              <a:rPr lang="en-US" dirty="0" smtClean="0">
+                <a:solidFill>
+                  <a:schemeClr val="accent4">
+                    <a:lumMod val="76000"/>
+                  </a:schemeClr>
+                </a:solidFill>
+                <a:latin typeface="Abadi"/>
+              </a:rPr>
+              <a:t>14</a:t>
+            </a:fld>
+            <a:endParaRPr lang="en-US" dirty="0">
+              <a:solidFill>
+                <a:schemeClr val="accent4">
+                  <a:lumMod val="76000"/>
+                </a:schemeClr>
+              </a:solidFill>
+              <a:latin typeface="Abadi"/>
+            </a:endParaRPr>
+          </a:p>
+        </p:txBody>
+      </p:sp>
     </p:spTree>
     <p:extLst>
       <p:ext uri="{BB962C8B-B14F-4D97-AF65-F5344CB8AC3E}">
@@ -8069,6 +8339,49 @@
           </a:prstGeom>
         </p:spPr>
       </p:pic>
+      <p:sp>
+        <p:nvSpPr>
+          <p:cNvPr id="2" name="Slide Number Placeholder 1">
+            <a:extLst>
+              <a:ext uri="{FF2B5EF4-FFF2-40B4-BE49-F238E27FC236}">
+                <a16:creationId xmlns:a16="http://schemas.microsoft.com/office/drawing/2014/main" id="{A566AB3C-387E-4286-5560-DAAF45D12BFD}"/>
+              </a:ext>
+            </a:extLst>
+          </p:cNvPr>
+          <p:cNvSpPr>
+            <a:spLocks noGrp="1"/>
+          </p:cNvSpPr>
+          <p:nvPr>
+            <p:ph type="sldNum" sz="quarter" idx="12"/>
+          </p:nvPr>
+        </p:nvSpPr>
+        <p:spPr/>
+        <p:txBody>
+          <a:bodyPr/>
+          <a:lstStyle/>
+          <a:p>
+            <a:fld id="{A190C97C-0095-2443-AC12-FA4CBA4ACD4D}" type="slidenum">
+              <a:rPr lang="en-US" dirty="0" smtClean="0">
+                <a:solidFill>
+                  <a:schemeClr val="accent4">
+                    <a:lumMod val="76000"/>
+                  </a:schemeClr>
+                </a:solidFill>
+                <a:latin typeface="Abadi"/>
+              </a:rPr>
+              <a:t>15</a:t>
+            </a:fld>
+            <a:endParaRPr lang="en-US" dirty="0">
+              <a:solidFill>
+                <a:schemeClr val="accent4">
+                  <a:lumMod val="76000"/>
+                </a:schemeClr>
+              </a:solidFill>
+              <a:latin typeface="Abadi"/>
+            </a:endParaRPr>
+          </a:p>
+        </p:txBody>
+      </p:sp>
     </p:spTree>
     <p:extLst>
       <p:ext uri="{BB962C8B-B14F-4D97-AF65-F5344CB8AC3E}">
@@ -8164,7 +8477,7 @@
         </p:blipFill>
         <p:spPr bwMode="auto">
           <a:xfrm>
-            <a:off x="10612071" y="5432400"/>
+            <a:off x="9345246" y="5432400"/>
             <a:ext cx="1470757" cy="1425600"/>
           </a:xfrm>
           <a:prstGeom prst="rect">
@@ -8182,6 +8495,49 @@
           </a:extLst>
         </p:spPr>
       </p:pic>
+      <p:sp>
+        <p:nvSpPr>
+          <p:cNvPr id="2" name="Slide Number Placeholder 1">
+            <a:extLst>
+              <a:ext uri="{FF2B5EF4-FFF2-40B4-BE49-F238E27FC236}">
+                <a16:creationId xmlns:a16="http://schemas.microsoft.com/office/drawing/2014/main" id="{E4861666-5947-1F15-3CA6-F8DD74255694}"/>
+              </a:ext>
+            </a:extLst>
+          </p:cNvPr>
+          <p:cNvSpPr>
+            <a:spLocks noGrp="1"/>
+          </p:cNvSpPr>
+          <p:nvPr>
+            <p:ph type="sldNum" sz="quarter" idx="12"/>
+          </p:nvPr>
+        </p:nvSpPr>
+        <p:spPr/>
+        <p:txBody>
+          <a:bodyPr/>
+          <a:lstStyle/>
+          <a:p>
+            <a:fld id="{A190C97C-0095-2443-AC12-FA4CBA4ACD4D}" type="slidenum">
+              <a:rPr lang="en-US" dirty="0" smtClean="0">
+                <a:solidFill>
+                  <a:schemeClr val="accent4">
+                    <a:lumMod val="76000"/>
+                  </a:schemeClr>
+                </a:solidFill>
+                <a:latin typeface="Abadi"/>
+              </a:rPr>
+              <a:t>16</a:t>
+            </a:fld>
+            <a:endParaRPr lang="en-US" dirty="0">
+              <a:solidFill>
+                <a:schemeClr val="accent4">
+                  <a:lumMod val="76000"/>
+                </a:schemeClr>
+              </a:solidFill>
+              <a:latin typeface="Abadi"/>
+            </a:endParaRPr>
+          </a:p>
+        </p:txBody>
+      </p:sp>
     </p:spTree>
     <p:extLst>
       <p:ext uri="{BB962C8B-B14F-4D97-AF65-F5344CB8AC3E}">
@@ -8528,6 +8884,49 @@
           </a:p>
         </p:txBody>
       </p:sp>
+      <p:sp>
+        <p:nvSpPr>
+          <p:cNvPr id="11" name="Slide Number Placeholder 10">
+            <a:extLst>
+              <a:ext uri="{FF2B5EF4-FFF2-40B4-BE49-F238E27FC236}">
+                <a16:creationId xmlns:a16="http://schemas.microsoft.com/office/drawing/2014/main" id="{1E46EF5A-A584-47B4-25AE-62EAD5A55807}"/>
+              </a:ext>
+            </a:extLst>
+          </p:cNvPr>
+          <p:cNvSpPr>
+            <a:spLocks noGrp="1"/>
+          </p:cNvSpPr>
+          <p:nvPr>
+            <p:ph type="sldNum" sz="quarter" idx="12"/>
+          </p:nvPr>
+        </p:nvSpPr>
+        <p:spPr/>
+        <p:txBody>
+          <a:bodyPr/>
+          <a:lstStyle/>
+          <a:p>
+            <a:fld id="{A190C97C-0095-2443-AC12-FA4CBA4ACD4D}" type="slidenum">
+              <a:rPr lang="en-US" dirty="0" smtClean="0">
+                <a:solidFill>
+                  <a:schemeClr val="accent4">
+                    <a:lumMod val="76000"/>
+                  </a:schemeClr>
+                </a:solidFill>
+                <a:latin typeface="Abadi"/>
+              </a:rPr>
+              <a:t>17</a:t>
+            </a:fld>
+            <a:endParaRPr lang="en-US" dirty="0">
+              <a:solidFill>
+                <a:schemeClr val="accent4">
+                  <a:lumMod val="76000"/>
+                </a:schemeClr>
+              </a:solidFill>
+              <a:latin typeface="Abadi"/>
+            </a:endParaRPr>
+          </a:p>
+        </p:txBody>
+      </p:sp>
     </p:spTree>
     <p:extLst>
       <p:ext uri="{BB962C8B-B14F-4D97-AF65-F5344CB8AC3E}">
@@ -8862,6 +9261,49 @@
           </a:p>
         </p:txBody>
       </p:sp>
+      <p:sp>
+        <p:nvSpPr>
+          <p:cNvPr id="11" name="Slide Number Placeholder 10">
+            <a:extLst>
+              <a:ext uri="{FF2B5EF4-FFF2-40B4-BE49-F238E27FC236}">
+                <a16:creationId xmlns:a16="http://schemas.microsoft.com/office/drawing/2014/main" id="{14782217-11E8-B095-06E1-1534DB6EE266}"/>
+              </a:ext>
+            </a:extLst>
+          </p:cNvPr>
+          <p:cNvSpPr>
+            <a:spLocks noGrp="1"/>
+          </p:cNvSpPr>
+          <p:nvPr>
+            <p:ph type="sldNum" sz="quarter" idx="12"/>
+          </p:nvPr>
+        </p:nvSpPr>
+        <p:spPr/>
+        <p:txBody>
+          <a:bodyPr/>
+          <a:lstStyle/>
+          <a:p>
+            <a:fld id="{A190C97C-0095-2443-AC12-FA4CBA4ACD4D}" type="slidenum">
+              <a:rPr lang="en-US" dirty="0" smtClean="0">
+                <a:solidFill>
+                  <a:schemeClr val="accent4">
+                    <a:lumMod val="76000"/>
+                  </a:schemeClr>
+                </a:solidFill>
+                <a:latin typeface="Abadi"/>
+              </a:rPr>
+              <a:t>18</a:t>
+            </a:fld>
+            <a:endParaRPr lang="en-US" dirty="0">
+              <a:solidFill>
+                <a:schemeClr val="accent4">
+                  <a:lumMod val="76000"/>
+                </a:schemeClr>
+              </a:solidFill>
+              <a:latin typeface="Abadi"/>
+            </a:endParaRPr>
+          </a:p>
+        </p:txBody>
+      </p:sp>
     </p:spTree>
     <p:extLst>
       <p:ext uri="{BB962C8B-B14F-4D97-AF65-F5344CB8AC3E}">
@@ -9205,6 +9647,49 @@
           </a:prstGeom>
         </p:spPr>
       </p:pic>
+      <p:sp>
+        <p:nvSpPr>
+          <p:cNvPr id="11" name="Slide Number Placeholder 10">
+            <a:extLst>
+              <a:ext uri="{FF2B5EF4-FFF2-40B4-BE49-F238E27FC236}">
+                <a16:creationId xmlns:a16="http://schemas.microsoft.com/office/drawing/2014/main" id="{BD1D96F1-EB9D-ACAE-3151-251F87C94763}"/>
+              </a:ext>
+            </a:extLst>
+          </p:cNvPr>
+          <p:cNvSpPr>
+            <a:spLocks noGrp="1"/>
+          </p:cNvSpPr>
+          <p:nvPr>
+            <p:ph type="sldNum" sz="quarter" idx="12"/>
+          </p:nvPr>
+        </p:nvSpPr>
+        <p:spPr/>
+        <p:txBody>
+          <a:bodyPr/>
+          <a:lstStyle/>
+          <a:p>
+            <a:fld id="{A190C97C-0095-2443-AC12-FA4CBA4ACD4D}" type="slidenum">
+              <a:rPr lang="en-US" dirty="0" smtClean="0">
+                <a:solidFill>
+                  <a:schemeClr val="accent4">
+                    <a:lumMod val="76000"/>
+                  </a:schemeClr>
+                </a:solidFill>
+                <a:latin typeface="Abadi"/>
+              </a:rPr>
+              <a:t>19</a:t>
+            </a:fld>
+            <a:endParaRPr lang="en-US" dirty="0">
+              <a:solidFill>
+                <a:schemeClr val="accent4">
+                  <a:lumMod val="76000"/>
+                </a:schemeClr>
+              </a:solidFill>
+              <a:latin typeface="Abadi"/>
+            </a:endParaRPr>
+          </a:p>
+        </p:txBody>
+      </p:sp>
     </p:spTree>
     <p:extLst>
       <p:ext uri="{BB962C8B-B14F-4D97-AF65-F5344CB8AC3E}">
@@ -9237,38 +9722,6 @@
       </p:grpSpPr>
       <p:sp>
         <p:nvSpPr>
-          <p:cNvPr id="4" name="Slide Number Placeholder 3">
-            <a:extLst>
-              <a:ext uri="{FF2B5EF4-FFF2-40B4-BE49-F238E27FC236}">
-                <a16:creationId xmlns:a16="http://schemas.microsoft.com/office/drawing/2014/main" id="{E2403FD9-22AB-4833-9FE0-E1E67C96862D}"/>
-              </a:ext>
-            </a:extLst>
-          </p:cNvPr>
-          <p:cNvSpPr>
-            <a:spLocks noGrp="1"/>
-          </p:cNvSpPr>
-          <p:nvPr>
-            <p:ph type="sldNum" sz="quarter" idx="12"/>
-          </p:nvPr>
-        </p:nvSpPr>
-        <p:spPr/>
-        <p:txBody>
-          <a:bodyPr anchor="ctr">
-            <a:normAutofit/>
-          </a:bodyPr>
-          <a:lstStyle/>
-          <a:p>
-            <a:fld id="{5075537C-CA84-1446-933C-8E9D027F9201}" type="slidenum">
-              <a:rPr lang="en-US" smtClean="0"/>
-              <a:pPr/>
-              <a:t>2</a:t>
-            </a:fld>
-            <a:endParaRPr lang="en-US" dirty="0"/>
-          </a:p>
-        </p:txBody>
-      </p:sp>
-      <p:sp>
-        <p:nvSpPr>
           <p:cNvPr id="10" name="Content Placeholder 2">
             <a:extLst>
               <a:ext uri="{FF2B5EF4-FFF2-40B4-BE49-F238E27FC236}">
@@ -9645,6 +10098,49 @@
               <a:t>Outline</a:t>
             </a:r>
             <a:endParaRPr lang="en-US" dirty="0">
+              <a:solidFill>
+                <a:schemeClr val="accent4">
+                  <a:lumMod val="76000"/>
+                </a:schemeClr>
+              </a:solidFill>
+              <a:latin typeface="Abadi"/>
+            </a:endParaRPr>
+          </a:p>
+        </p:txBody>
+      </p:sp>
+      <p:sp>
+        <p:nvSpPr>
+          <p:cNvPr id="2" name="Slide Number Placeholder 1">
+            <a:extLst>
+              <a:ext uri="{FF2B5EF4-FFF2-40B4-BE49-F238E27FC236}">
+                <a16:creationId xmlns:a16="http://schemas.microsoft.com/office/drawing/2014/main" id="{FA1297A8-0D5D-D3C8-2790-29F687A5CFF0}"/>
+              </a:ext>
+            </a:extLst>
+          </p:cNvPr>
+          <p:cNvSpPr>
+            <a:spLocks noGrp="1"/>
+          </p:cNvSpPr>
+          <p:nvPr>
+            <p:ph type="sldNum" sz="quarter" idx="12"/>
+          </p:nvPr>
+        </p:nvSpPr>
+        <p:spPr/>
+        <p:txBody>
+          <a:bodyPr/>
+          <a:lstStyle/>
+          <a:p>
+            <a:fld id="{A190C97C-0095-2443-AC12-FA4CBA4ACD4D}" type="slidenum">
+              <a:rPr lang="en-US" dirty="0" smtClean="0">
+                <a:solidFill>
+                  <a:schemeClr val="accent4">
+                    <a:lumMod val="76000"/>
+                  </a:schemeClr>
+                </a:solidFill>
+                <a:latin typeface="Abadi"/>
+              </a:rPr>
+              <a:t>2</a:t>
+            </a:fld>
+            <a:endParaRPr lang="en-US">
               <a:solidFill>
                 <a:schemeClr val="accent4">
                   <a:lumMod val="76000"/>
@@ -9979,6 +10475,49 @@
           </a:prstGeom>
         </p:spPr>
       </p:pic>
+      <p:sp>
+        <p:nvSpPr>
+          <p:cNvPr id="18" name="Slide Number Placeholder 17">
+            <a:extLst>
+              <a:ext uri="{FF2B5EF4-FFF2-40B4-BE49-F238E27FC236}">
+                <a16:creationId xmlns:a16="http://schemas.microsoft.com/office/drawing/2014/main" id="{472C0444-3633-78E8-FB2B-4B376E8641F3}"/>
+              </a:ext>
+            </a:extLst>
+          </p:cNvPr>
+          <p:cNvSpPr>
+            <a:spLocks noGrp="1"/>
+          </p:cNvSpPr>
+          <p:nvPr>
+            <p:ph type="sldNum" sz="quarter" idx="12"/>
+          </p:nvPr>
+        </p:nvSpPr>
+        <p:spPr/>
+        <p:txBody>
+          <a:bodyPr/>
+          <a:lstStyle/>
+          <a:p>
+            <a:fld id="{A190C97C-0095-2443-AC12-FA4CBA4ACD4D}" type="slidenum">
+              <a:rPr lang="en-US" dirty="0" smtClean="0">
+                <a:solidFill>
+                  <a:schemeClr val="accent4">
+                    <a:lumMod val="76000"/>
+                  </a:schemeClr>
+                </a:solidFill>
+                <a:latin typeface="Abadi"/>
+              </a:rPr>
+              <a:t>20</a:t>
+            </a:fld>
+            <a:endParaRPr lang="en-US" dirty="0">
+              <a:solidFill>
+                <a:schemeClr val="accent4">
+                  <a:lumMod val="76000"/>
+                </a:schemeClr>
+              </a:solidFill>
+              <a:latin typeface="Abadi"/>
+            </a:endParaRPr>
+          </a:p>
+        </p:txBody>
+      </p:sp>
     </p:spTree>
     <p:extLst>
       <p:ext uri="{BB962C8B-B14F-4D97-AF65-F5344CB8AC3E}">
@@ -10309,6 +10848,48 @@
           </a:prstGeom>
         </p:spPr>
       </p:pic>
+      <p:sp>
+        <p:nvSpPr>
+          <p:cNvPr id="3" name="Slide Number Placeholder 2">
+            <a:extLst>
+              <a:ext uri="{FF2B5EF4-FFF2-40B4-BE49-F238E27FC236}">
+                <a16:creationId xmlns:a16="http://schemas.microsoft.com/office/drawing/2014/main" id="{35E1397A-717A-4EFB-7160-11E7936185AA}"/>
+              </a:ext>
+            </a:extLst>
+          </p:cNvPr>
+          <p:cNvSpPr>
+            <a:spLocks noGrp="1"/>
+          </p:cNvSpPr>
+          <p:nvPr>
+            <p:ph type="sldNum" sz="quarter" idx="12"/>
+          </p:nvPr>
+        </p:nvSpPr>
+        <p:spPr/>
+        <p:txBody>
+          <a:bodyPr/>
+          <a:lstStyle/>
+          <a:p>
+            <a:fld id="{A190C97C-0095-2443-AC12-FA4CBA4ACD4D}" type="slidenum">
+              <a:rPr lang="en-US" dirty="0" smtClean="0">
+                <a:solidFill>
+                  <a:schemeClr val="accent4">
+                    <a:lumMod val="76000"/>
+                  </a:schemeClr>
+                </a:solidFill>
+                <a:latin typeface="Abadi"/>
+              </a:rPr>
+              <a:t>21</a:t>
+            </a:fld>
+            <a:endParaRPr lang="en-US">
+              <a:solidFill>
+                <a:schemeClr val="accent4">
+                  <a:lumMod val="76000"/>
+                </a:schemeClr>
+              </a:solidFill>
+            </a:endParaRPr>
+          </a:p>
+        </p:txBody>
+      </p:sp>
     </p:spTree>
     <p:extLst>
       <p:ext uri="{BB962C8B-B14F-4D97-AF65-F5344CB8AC3E}">
@@ -10584,21 +11165,9 @@
                 <a:ea typeface="+mn-lt"/>
                 <a:cs typeface="+mn-lt"/>
               </a:rPr>
-              <a:t>This chart compares the RMSE performance of different collaborative filtering approaches. Traditional methods like KNN and NMF show higher error, while neural models significantly improve accuracy. The best performance is achieved by neural architectures, especially the classification-based model (NNC), indicating their superior ability to capture complex user–item </a:t>
-            </a:r>
-            <a:r>
-              <a:rPr lang="en-US" sz="2000">
-                <a:solidFill>
-                  <a:schemeClr val="accent4">
-                    <a:lumMod val="49000"/>
-                  </a:schemeClr>
-                </a:solidFill>
-                <a:ea typeface="+mn-lt"/>
-                <a:cs typeface="+mn-lt"/>
-              </a:rPr>
-              <a:t>interactions.</a:t>
-            </a:r>
-            <a:endParaRPr lang="en-US">
+              <a:t>This chart compares the RMSE performance of different collaborative filtering approaches. Traditional methods like KNN and NMF show higher error, while neural models significantly improve accuracy. The best performance is achieved by neural architectures, especially the classification-based model (NNC), indicating their superior ability to capture complex user–item interactions.</a:t>
+            </a:r>
+            <a:endParaRPr lang="en-US" dirty="0">
               <a:solidFill>
                 <a:schemeClr val="accent4">
                   <a:lumMod val="49000"/>
@@ -10640,6 +11209,49 @@
           </a:prstGeom>
         </p:spPr>
       </p:pic>
+      <p:sp>
+        <p:nvSpPr>
+          <p:cNvPr id="8" name="Slide Number Placeholder 7">
+            <a:extLst>
+              <a:ext uri="{FF2B5EF4-FFF2-40B4-BE49-F238E27FC236}">
+                <a16:creationId xmlns:a16="http://schemas.microsoft.com/office/drawing/2014/main" id="{D0D391F3-5247-1846-8E40-F943130DC198}"/>
+              </a:ext>
+            </a:extLst>
+          </p:cNvPr>
+          <p:cNvSpPr>
+            <a:spLocks noGrp="1"/>
+          </p:cNvSpPr>
+          <p:nvPr>
+            <p:ph type="sldNum" sz="quarter" idx="12"/>
+          </p:nvPr>
+        </p:nvSpPr>
+        <p:spPr/>
+        <p:txBody>
+          <a:bodyPr/>
+          <a:lstStyle/>
+          <a:p>
+            <a:fld id="{A190C97C-0095-2443-AC12-FA4CBA4ACD4D}" type="slidenum">
+              <a:rPr lang="en-US" dirty="0" smtClean="0">
+                <a:solidFill>
+                  <a:schemeClr val="accent4">
+                    <a:lumMod val="76000"/>
+                  </a:schemeClr>
+                </a:solidFill>
+                <a:latin typeface="Abadi"/>
+              </a:rPr>
+              <a:t>22</a:t>
+            </a:fld>
+            <a:endParaRPr lang="en-US" dirty="0">
+              <a:solidFill>
+                <a:schemeClr val="accent4">
+                  <a:lumMod val="76000"/>
+                </a:schemeClr>
+              </a:solidFill>
+              <a:latin typeface="Abadi"/>
+            </a:endParaRPr>
+          </a:p>
+        </p:txBody>
+      </p:sp>
     </p:spTree>
     <p:extLst>
       <p:ext uri="{BB962C8B-B14F-4D97-AF65-F5344CB8AC3E}">
@@ -10672,35 +11284,6 @@
       </p:grpSpPr>
       <p:sp>
         <p:nvSpPr>
-          <p:cNvPr id="4" name="Slide Number Placeholder 3">
-            <a:extLst>
-              <a:ext uri="{FF2B5EF4-FFF2-40B4-BE49-F238E27FC236}">
-                <a16:creationId xmlns:a16="http://schemas.microsoft.com/office/drawing/2014/main" id="{8DA56319-AADE-D741-AA33-1311B7CA8C0C}"/>
-              </a:ext>
-            </a:extLst>
-          </p:cNvPr>
-          <p:cNvSpPr>
-            <a:spLocks noGrp="1"/>
-          </p:cNvSpPr>
-          <p:nvPr>
-            <p:ph type="sldNum" sz="quarter" idx="12"/>
-          </p:nvPr>
-        </p:nvSpPr>
-        <p:spPr/>
-        <p:txBody>
-          <a:bodyPr/>
-          <a:lstStyle/>
-          <a:p>
-            <a:fld id="{5075537C-CA84-1446-933C-8E9D027F9201}" type="slidenum">
-              <a:rPr lang="en-US" smtClean="0"/>
-              <a:t>23</a:t>
-            </a:fld>
-            <a:endParaRPr lang="en-US"/>
-          </a:p>
-        </p:txBody>
-      </p:sp>
-      <p:sp>
-        <p:nvSpPr>
           <p:cNvPr id="5" name="Content Placeholder 3">
             <a:extLst>
               <a:ext uri="{FF2B5EF4-FFF2-40B4-BE49-F238E27FC236}">
@@ -10725,8 +11308,8 @@
           </a:prstGeom>
         </p:spPr>
         <p:txBody>
-          <a:bodyPr>
-            <a:normAutofit/>
+          <a:bodyPr lIns="91440" tIns="45720" rIns="91440" bIns="45720" anchor="t">
+            <a:normAutofit fontScale="85000" lnSpcReduction="20000"/>
           </a:bodyPr>
           <a:lstStyle/>
           <a:p>
@@ -10741,14 +11324,33 @@
             <a:r>
               <a:rPr lang="en-US" sz="2000" dirty="0">
                 <a:solidFill>
-                  <a:schemeClr val="accent3">
-                    <a:lumMod val="25000"/>
+                  <a:schemeClr val="accent4">
+                    <a:lumMod val="49000"/>
                   </a:schemeClr>
                 </a:solidFill>
-                <a:latin typeface="Abadi" panose="020B0604020104020204" pitchFamily="34" charset="0"/>
+                <a:latin typeface="Abadi"/>
               </a:rPr>
-              <a:t>Point 1</a:t>
-            </a:r>
+              <a:t>Users struggle to discover </a:t>
+            </a:r>
+            <a:r>
+              <a:rPr lang="en-US" sz="2000">
+                <a:solidFill>
+                  <a:schemeClr val="accent4">
+                    <a:lumMod val="49000"/>
+                  </a:schemeClr>
+                </a:solidFill>
+                <a:latin typeface="Abadi"/>
+              </a:rPr>
+              <a:t>relevant courses due to content overload.</a:t>
+            </a:r>
+            <a:endParaRPr lang="en-US" sz="2000" dirty="0">
+              <a:solidFill>
+                <a:schemeClr val="accent4">
+                  <a:lumMod val="49000"/>
+                </a:schemeClr>
+              </a:solidFill>
+              <a:latin typeface="Abadi"/>
+            </a:endParaRPr>
           </a:p>
           <a:p>
             <a:pPr>
@@ -10762,13 +11364,35 @@
             <a:r>
               <a:rPr lang="en-US" sz="2000" dirty="0">
                 <a:solidFill>
-                  <a:schemeClr val="accent3">
-                    <a:lumMod val="25000"/>
+                  <a:schemeClr val="accent4">
+                    <a:lumMod val="49000"/>
                   </a:schemeClr>
                 </a:solidFill>
-                <a:latin typeface="Abadi" panose="020B0604020104020204" pitchFamily="34" charset="0"/>
+                <a:latin typeface="Abadi"/>
               </a:rPr>
-              <a:t>Point 2</a:t>
+              <a:t>Content based, collaborative filtering, and deep learning models are evaluated </a:t>
+            </a:r>
+            <a:r>
+              <a:rPr lang="en-US" sz="2000">
+                <a:solidFill>
+                  <a:schemeClr val="accent4">
+                    <a:lumMod val="49000"/>
+                  </a:schemeClr>
+                </a:solidFill>
+                <a:latin typeface="Abadi"/>
+              </a:rPr>
+              <a:t>approaches</a:t>
+            </a:r>
+            <a:r>
+              <a:rPr lang="en-US" sz="2000" dirty="0">
+                <a:solidFill>
+                  <a:schemeClr val="accent4">
+                    <a:lumMod val="49000"/>
+                  </a:schemeClr>
+                </a:solidFill>
+                <a:latin typeface="Abadi"/>
+              </a:rPr>
+              <a:t>.</a:t>
             </a:r>
           </a:p>
           <a:p>
@@ -10783,14 +11407,55 @@
             <a:r>
               <a:rPr lang="en-US" sz="2000" dirty="0">
                 <a:solidFill>
-                  <a:schemeClr val="accent3">
-                    <a:lumMod val="25000"/>
+                  <a:schemeClr val="accent4">
+                    <a:lumMod val="49000"/>
                   </a:schemeClr>
                 </a:solidFill>
-                <a:latin typeface="Abadi" panose="020B0604020104020204" pitchFamily="34" charset="0"/>
+                <a:latin typeface="Abadi"/>
               </a:rPr>
-              <a:t>Point 3</a:t>
-            </a:r>
+              <a:t>User preferences are highly </a:t>
+            </a:r>
+            <a:r>
+              <a:rPr lang="en-US" sz="2000">
+                <a:solidFill>
+                  <a:schemeClr val="accent4">
+                    <a:lumMod val="49000"/>
+                  </a:schemeClr>
+                </a:solidFill>
+                <a:latin typeface="Abadi"/>
+              </a:rPr>
+              <a:t>nonlinear</a:t>
+            </a:r>
+            <a:r>
+              <a:rPr lang="en-US" sz="2000" dirty="0">
+                <a:solidFill>
+                  <a:schemeClr val="accent4">
+                    <a:lumMod val="49000"/>
+                  </a:schemeClr>
+                </a:solidFill>
+                <a:latin typeface="Abadi"/>
+              </a:rPr>
+              <a:t> and context </a:t>
+            </a:r>
+            <a:r>
+              <a:rPr lang="en-US" sz="2000">
+                <a:solidFill>
+                  <a:schemeClr val="accent4">
+                    <a:lumMod val="49000"/>
+                  </a:schemeClr>
+                </a:solidFill>
+                <a:latin typeface="Abadi"/>
+              </a:rPr>
+              <a:t>dependent.</a:t>
+            </a:r>
+            <a:endParaRPr lang="en-US" sz="2000" dirty="0">
+              <a:solidFill>
+                <a:schemeClr val="accent4">
+                  <a:lumMod val="49000"/>
+                </a:schemeClr>
+              </a:solidFill>
+              <a:latin typeface="Abadi"/>
+            </a:endParaRPr>
           </a:p>
           <a:p>
             <a:pPr>
@@ -10804,14 +11469,33 @@
             <a:r>
               <a:rPr lang="en-US" sz="2000" dirty="0">
                 <a:solidFill>
-                  <a:schemeClr val="accent3">
-                    <a:lumMod val="25000"/>
+                  <a:schemeClr val="accent4">
+                    <a:lumMod val="49000"/>
                   </a:schemeClr>
                 </a:solidFill>
-                <a:latin typeface="Abadi" panose="020B0604020104020204" pitchFamily="34" charset="0"/>
+                <a:latin typeface="Abadi"/>
               </a:rPr>
-              <a:t>Point 4</a:t>
-            </a:r>
+              <a:t>Traditional Models like KNN provide baseline performance, but neural models </a:t>
+            </a:r>
+            <a:r>
+              <a:rPr lang="en-US" sz="2000">
+                <a:solidFill>
+                  <a:schemeClr val="accent4">
+                    <a:lumMod val="49000"/>
+                  </a:schemeClr>
+                </a:solidFill>
+                <a:latin typeface="Abadi"/>
+              </a:rPr>
+              <a:t>significantly improve prediction accuracy.</a:t>
+            </a:r>
+            <a:endParaRPr lang="en-US" sz="2000" dirty="0">
+              <a:solidFill>
+                <a:schemeClr val="accent4">
+                  <a:lumMod val="49000"/>
+                </a:schemeClr>
+              </a:solidFill>
+              <a:latin typeface="Abadi"/>
+            </a:endParaRPr>
           </a:p>
           <a:p>
             <a:pPr>
@@ -10821,18 +11505,110 @@
               <a:spcBef>
                 <a:spcPts val="1400"/>
               </a:spcBef>
+              <a:buFont typeface="Arial"/>
+              <a:buChar char="•"/>
             </a:pPr>
             <a:r>
-              <a:rPr lang="en-US" sz="2000" dirty="0">
-                <a:solidFill>
-                  <a:schemeClr val="accent3">
-                    <a:lumMod val="25000"/>
+              <a:rPr lang="en-US" sz="2000">
+                <a:solidFill>
+                  <a:schemeClr val="accent4">
+                    <a:lumMod val="49000"/>
                   </a:schemeClr>
                 </a:solidFill>
-                <a:latin typeface="Abadi" panose="020B0604020104020204" pitchFamily="34" charset="0"/>
+                <a:latin typeface="Abadi"/>
               </a:rPr>
-              <a:t>…</a:t>
-            </a:r>
+              <a:t>Embedding-based with Classification neural architecture achieved the best results.</a:t>
+            </a:r>
+            <a:endParaRPr lang="en-US" sz="2000" dirty="0">
+              <a:solidFill>
+                <a:schemeClr val="accent4">
+                  <a:lumMod val="49000"/>
+                </a:schemeClr>
+              </a:solidFill>
+              <a:latin typeface="Abadi"/>
+            </a:endParaRPr>
+          </a:p>
+          <a:p>
+            <a:pPr>
+              <a:lnSpc>
+                <a:spcPct val="100000"/>
+              </a:lnSpc>
+              <a:spcBef>
+                <a:spcPts val="1400"/>
+              </a:spcBef>
+              <a:buFont typeface="Arial"/>
+              <a:buChar char="•"/>
+            </a:pPr>
+            <a:r>
+              <a:rPr lang="en-US" sz="2000">
+                <a:solidFill>
+                  <a:schemeClr val="accent4">
+                    <a:lumMod val="49000"/>
+                  </a:schemeClr>
+                </a:solidFill>
+                <a:latin typeface="Abadi"/>
+              </a:rPr>
+              <a:t>Cold start problem is a limitation for new Users/Items.</a:t>
+            </a:r>
+            <a:endParaRPr lang="en-US" sz="2000" dirty="0">
+              <a:solidFill>
+                <a:schemeClr val="accent4">
+                  <a:lumMod val="49000"/>
+                </a:schemeClr>
+              </a:solidFill>
+              <a:latin typeface="Abadi"/>
+            </a:endParaRPr>
+          </a:p>
+          <a:p>
+            <a:pPr>
+              <a:lnSpc>
+                <a:spcPct val="100000"/>
+              </a:lnSpc>
+              <a:spcBef>
+                <a:spcPts val="1400"/>
+              </a:spcBef>
+              <a:buFont typeface="Arial"/>
+              <a:buChar char="•"/>
+            </a:pPr>
+            <a:r>
+              <a:rPr lang="en-US" sz="2000">
+                <a:solidFill>
+                  <a:schemeClr val="accent4">
+                    <a:lumMod val="49000"/>
+                  </a:schemeClr>
+                </a:solidFill>
+                <a:latin typeface="Abadi"/>
+              </a:rPr>
+              <a:t>For future work a hybrid recommender system can give better results.</a:t>
+            </a:r>
+            <a:endParaRPr lang="en-US" sz="2000" dirty="0">
+              <a:solidFill>
+                <a:schemeClr val="accent4">
+                  <a:lumMod val="49000"/>
+                </a:schemeClr>
+              </a:solidFill>
+              <a:latin typeface="Abadi"/>
+            </a:endParaRPr>
+          </a:p>
+          <a:p>
+            <a:pPr>
+              <a:lnSpc>
+                <a:spcPct val="100000"/>
+              </a:lnSpc>
+              <a:spcBef>
+                <a:spcPts val="1400"/>
+              </a:spcBef>
+              <a:buFont typeface="Arial"/>
+              <a:buChar char="•"/>
+            </a:pPr>
+            <a:endParaRPr lang="en-US" sz="2000" dirty="0">
+              <a:solidFill>
+                <a:schemeClr val="accent4">
+                  <a:lumMod val="49000"/>
+                </a:schemeClr>
+              </a:solidFill>
+              <a:latin typeface="Abadi"/>
+            </a:endParaRPr>
           </a:p>
         </p:txBody>
       </p:sp>
@@ -10886,16 +11662,63 @@
             <a:r>
               <a:rPr lang="en-US" dirty="0">
                 <a:solidFill>
-                  <a:srgbClr val="0B49CB"/>
+                  <a:schemeClr val="accent4">
+                    <a:lumMod val="76000"/>
+                  </a:schemeClr>
                 </a:solidFill>
                 <a:latin typeface="Abadi"/>
               </a:rPr>
               <a:t>Conclusions</a:t>
             </a:r>
+            <a:endParaRPr lang="en-US">
+              <a:solidFill>
+                <a:schemeClr val="accent4">
+                  <a:lumMod val="76000"/>
+                </a:schemeClr>
+              </a:solidFill>
+            </a:endParaRPr>
+          </a:p>
+        </p:txBody>
+      </p:sp>
+      <p:sp>
+        <p:nvSpPr>
+          <p:cNvPr id="2" name="Slide Number Placeholder 1">
+            <a:extLst>
+              <a:ext uri="{FF2B5EF4-FFF2-40B4-BE49-F238E27FC236}">
+                <a16:creationId xmlns:a16="http://schemas.microsoft.com/office/drawing/2014/main" id="{F94AFF66-E511-5C24-419F-1594D5D63E43}"/>
+              </a:ext>
+            </a:extLst>
+          </p:cNvPr>
+          <p:cNvSpPr>
+            <a:spLocks noGrp="1"/>
+          </p:cNvSpPr>
+          <p:nvPr>
+            <p:ph type="sldNum" sz="quarter" idx="12"/>
+          </p:nvPr>
+        </p:nvSpPr>
+        <p:spPr/>
+        <p:txBody>
+          <a:bodyPr/>
+          <a:lstStyle/>
+          <a:p>
+            <a:fld id="{A190C97C-0095-2443-AC12-FA4CBA4ACD4D}" type="slidenum">
+              <a:rPr lang="en-US" dirty="0" smtClean="0">
+                <a:solidFill>
+                  <a:schemeClr val="accent4">
+                    <a:lumMod val="76000"/>
+                  </a:schemeClr>
+                </a:solidFill>
+                <a:latin typeface="Abadi"/>
+              </a:rPr>
+              <a:t>23</a:t>
+            </a:fld>
             <a:endParaRPr lang="en-US" dirty="0">
               <a:solidFill>
-                <a:srgbClr val="0B49CB"/>
+                <a:schemeClr val="accent4">
+                  <a:lumMod val="76000"/>
+                </a:schemeClr>
               </a:solidFill>
+              <a:latin typeface="Abadi"/>
             </a:endParaRPr>
           </a:p>
         </p:txBody>
@@ -10932,35 +11755,6 @@
       </p:grpSpPr>
       <p:sp>
         <p:nvSpPr>
-          <p:cNvPr id="6" name="Slide Number Placeholder 5">
-            <a:extLst>
-              <a:ext uri="{FF2B5EF4-FFF2-40B4-BE49-F238E27FC236}">
-                <a16:creationId xmlns:a16="http://schemas.microsoft.com/office/drawing/2014/main" id="{E7525D5A-386D-C541-9D42-BBDEA82289E4}"/>
-              </a:ext>
-            </a:extLst>
-          </p:cNvPr>
-          <p:cNvSpPr>
-            <a:spLocks noGrp="1"/>
-          </p:cNvSpPr>
-          <p:nvPr>
-            <p:ph type="sldNum" sz="quarter" idx="12"/>
-          </p:nvPr>
-        </p:nvSpPr>
-        <p:spPr/>
-        <p:txBody>
-          <a:bodyPr/>
-          <a:lstStyle/>
-          <a:p>
-            <a:fld id="{5075537C-CA84-1446-933C-8E9D027F9201}" type="slidenum">
-              <a:rPr lang="en-US" smtClean="0"/>
-              <a:t>24</a:t>
-            </a:fld>
-            <a:endParaRPr lang="en-US"/>
-          </a:p>
-        </p:txBody>
-      </p:sp>
-      <p:sp>
-        <p:nvSpPr>
           <p:cNvPr id="5" name="Content Placeholder 3">
             <a:extLst>
               <a:ext uri="{FF2B5EF4-FFF2-40B4-BE49-F238E27FC236}">
@@ -10985,7 +11779,7 @@
           </a:prstGeom>
         </p:spPr>
         <p:txBody>
-          <a:bodyPr>
+          <a:bodyPr lIns="91440" tIns="45720" rIns="91440" bIns="45720" anchor="t">
             <a:normAutofit/>
           </a:bodyPr>
           <a:lstStyle/>
@@ -10999,100 +11793,42 @@
               </a:spcBef>
             </a:pPr>
             <a:r>
+              <a:rPr lang="en-US" sz="2000">
+                <a:solidFill>
+                  <a:schemeClr val="accent4">
+                    <a:lumMod val="49000"/>
+                  </a:schemeClr>
+                </a:solidFill>
+                <a:latin typeface="Abadi"/>
+              </a:rPr>
+              <a:t>Github Repository for the Code: </a:t>
+            </a:r>
+            <a:r>
               <a:rPr lang="en-US" sz="2000" dirty="0">
                 <a:solidFill>
-                  <a:schemeClr val="accent3">
-                    <a:lumMod val="25000"/>
+                  <a:schemeClr val="accent4">
+                    <a:lumMod val="49000"/>
                   </a:schemeClr>
                 </a:solidFill>
-                <a:latin typeface="Abadi" panose="020B0604020104020204" pitchFamily="34" charset="0"/>
+                <a:latin typeface="Abadi"/>
+                <a:hlinkClick r:id="rId3">
+                  <a:extLst>
+                    <a:ext uri="{A12FA001-AC4F-418D-AE19-62706E023703}">
+                      <ahyp:hlinkClr xmlns:ahyp="http://schemas.microsoft.com/office/drawing/2018/hyperlinkcolor" val="tx"/>
+                    </a:ext>
+                  </a:extLst>
+                </a:hlinkClick>
               </a:rPr>
-              <a:t>Asset 1</a:t>
-            </a:r>
-          </a:p>
-          <a:p>
-            <a:pPr>
-              <a:lnSpc>
-                <a:spcPct val="100000"/>
-              </a:lnSpc>
-              <a:spcBef>
-                <a:spcPts val="1400"/>
-              </a:spcBef>
-            </a:pPr>
-            <a:r>
-              <a:rPr lang="en-US" sz="2000" dirty="0">
-                <a:solidFill>
-                  <a:schemeClr val="accent3">
-                    <a:lumMod val="25000"/>
-                  </a:schemeClr>
-                </a:solidFill>
-                <a:latin typeface="Abadi" panose="020B0604020104020204" pitchFamily="34" charset="0"/>
-              </a:rPr>
-              <a:t>Asset 2</a:t>
-            </a:r>
-          </a:p>
-          <a:p>
-            <a:pPr>
-              <a:lnSpc>
-                <a:spcPct val="100000"/>
-              </a:lnSpc>
-              <a:spcBef>
-                <a:spcPts val="1400"/>
-              </a:spcBef>
-            </a:pPr>
-            <a:r>
-              <a:rPr lang="en-US" sz="2000" dirty="0">
-                <a:solidFill>
-                  <a:schemeClr val="accent3">
-                    <a:lumMod val="25000"/>
-                  </a:schemeClr>
-                </a:solidFill>
-                <a:latin typeface="Abadi" panose="020B0604020104020204" pitchFamily="34" charset="0"/>
-              </a:rPr>
-              <a:t>Asset 3</a:t>
-            </a:r>
-          </a:p>
-          <a:p>
-            <a:pPr>
-              <a:lnSpc>
-                <a:spcPct val="100000"/>
-              </a:lnSpc>
-              <a:spcBef>
-                <a:spcPts val="1400"/>
-              </a:spcBef>
-            </a:pPr>
-            <a:r>
-              <a:rPr lang="en-US" sz="2000" dirty="0">
-                <a:solidFill>
-                  <a:schemeClr val="accent3">
-                    <a:lumMod val="25000"/>
-                  </a:schemeClr>
-                </a:solidFill>
-                <a:latin typeface="Abadi" panose="020B0604020104020204" pitchFamily="34" charset="0"/>
-              </a:rPr>
-              <a:t>Asset 4</a:t>
-            </a:r>
-          </a:p>
-          <a:p>
-            <a:pPr>
-              <a:lnSpc>
-                <a:spcPct val="100000"/>
-              </a:lnSpc>
-              <a:spcBef>
-                <a:spcPts val="1400"/>
-              </a:spcBef>
-            </a:pPr>
-            <a:r>
-              <a:rPr lang="en-US" sz="2000" dirty="0">
-                <a:solidFill>
-                  <a:schemeClr val="accent3">
-                    <a:lumMod val="25000"/>
-                  </a:schemeClr>
-                </a:solidFill>
-                <a:latin typeface="Abadi" panose="020B0604020104020204" pitchFamily="34" charset="0"/>
-              </a:rPr>
-              <a:t>…</a:t>
-            </a:r>
+              <a:t>Link</a:t>
+            </a:r>
+            <a:endParaRPr lang="en-US" sz="2000">
+              <a:solidFill>
+                <a:schemeClr val="accent4">
+                  <a:lumMod val="49000"/>
+                </a:schemeClr>
+              </a:solidFill>
+              <a:latin typeface="Abadi"/>
+            </a:endParaRPr>
           </a:p>
         </p:txBody>
       </p:sp>
@@ -11146,7 +11882,9 @@
             <a:r>
               <a:rPr lang="en-US" dirty="0">
                 <a:solidFill>
-                  <a:srgbClr val="0B49CB"/>
+                  <a:schemeClr val="accent4">
+                    <a:lumMod val="76000"/>
+                  </a:schemeClr>
                 </a:solidFill>
                 <a:latin typeface="Abadi"/>
               </a:rPr>
@@ -11154,7 +11892,9 @@
             </a:r>
             <a:endParaRPr lang="en-US" dirty="0">
               <a:solidFill>
-                <a:srgbClr val="0B49CB"/>
+                <a:schemeClr val="accent4">
+                  <a:lumMod val="76000"/>
+                </a:schemeClr>
               </a:solidFill>
             </a:endParaRPr>
           </a:p>
@@ -11162,64 +11902,44 @@
       </p:sp>
       <p:sp>
         <p:nvSpPr>
-          <p:cNvPr id="8" name="TextBox 7">
+          <p:cNvPr id="2" name="Slide Number Placeholder 1">
             <a:extLst>
               <a:ext uri="{FF2B5EF4-FFF2-40B4-BE49-F238E27FC236}">
-                <a16:creationId xmlns:a16="http://schemas.microsoft.com/office/drawing/2014/main" id="{7D7A6CAE-F688-4369-AC35-E744AC60CBAB}"/>
+                <a16:creationId xmlns:a16="http://schemas.microsoft.com/office/drawing/2014/main" id="{6A329F10-6400-DF6B-C66D-687C34417CBB}"/>
               </a:ext>
             </a:extLst>
           </p:cNvPr>
-          <p:cNvSpPr txBox="1"/>
-          <p:nvPr/>
+          <p:cNvSpPr>
+            <a:spLocks noGrp="1"/>
+          </p:cNvSpPr>
+          <p:nvPr>
+            <p:ph type="sldNum" sz="quarter" idx="12"/>
+          </p:nvPr>
         </p:nvSpPr>
-        <p:spPr>
-          <a:xfrm>
-            <a:off x="6096000" y="1397675"/>
-            <a:ext cx="5770880" cy="2215991"/>
-          </a:xfrm>
-          <a:prstGeom prst="rect">
-            <a:avLst/>
-          </a:prstGeom>
-          <a:solidFill>
-            <a:schemeClr val="bg1">
-              <a:lumMod val="85000"/>
-            </a:schemeClr>
-          </a:solidFill>
-        </p:spPr>
+        <p:spPr/>
         <p:txBody>
-          <a:bodyPr wrap="square" rtlCol="0">
-            <a:spAutoFit/>
-          </a:bodyPr>
+          <a:bodyPr/>
           <a:lstStyle/>
           <a:p>
-            <a:r>
-              <a:rPr lang="en-US" sz="2000" dirty="0"/>
-              <a:t>Instructions for learner: </a:t>
-            </a:r>
-          </a:p>
-          <a:p>
-            <a:endParaRPr lang="en-US" sz="2000" dirty="0"/>
-          </a:p>
-          <a:p>
-            <a:pPr marL="285750" indent="-285750">
-              <a:buFontTx/>
-              <a:buChar char="-"/>
-            </a:pPr>
-            <a:r>
-              <a:rPr lang="en-US" sz="2000" dirty="0"/>
-              <a:t>Include any relevant assets like a GitHub repo, key Python code snippets, charts, notebook outputs, or deployed </a:t>
-            </a:r>
-            <a:r>
-              <a:rPr lang="en-US" sz="2000" dirty="0" err="1"/>
-              <a:t>Streamlit</a:t>
-            </a:r>
-            <a:r>
-              <a:rPr lang="en-US" sz="2000" dirty="0"/>
-              <a:t> app URLs that you may have created during this project</a:t>
-            </a:r>
-          </a:p>
-          <a:p>
-            <a:endParaRPr lang="en-US" dirty="0"/>
+            <a:fld id="{A190C97C-0095-2443-AC12-FA4CBA4ACD4D}" type="slidenum">
+              <a:rPr lang="en-US" dirty="0" smtClean="0">
+                <a:solidFill>
+                  <a:schemeClr val="accent4">
+                    <a:lumMod val="76000"/>
+                  </a:schemeClr>
+                </a:solidFill>
+                <a:latin typeface="Abadi"/>
+              </a:rPr>
+              <a:t>24</a:t>
+            </a:fld>
+            <a:endParaRPr lang="en-US" dirty="0">
+              <a:solidFill>
+                <a:schemeClr val="accent4">
+                  <a:lumMod val="76000"/>
+                </a:schemeClr>
+              </a:solidFill>
+              <a:latin typeface="Abadi"/>
+            </a:endParaRPr>
           </a:p>
         </p:txBody>
       </p:sp>
@@ -11255,47 +11975,6 @@
       </p:grpSpPr>
       <p:sp>
         <p:nvSpPr>
-          <p:cNvPr id="4" name="Slide Number Placeholder 3">
-            <a:extLst>
-              <a:ext uri="{FF2B5EF4-FFF2-40B4-BE49-F238E27FC236}">
-                <a16:creationId xmlns:a16="http://schemas.microsoft.com/office/drawing/2014/main" id="{E2403FD9-22AB-4833-9FE0-E1E67C96862D}"/>
-              </a:ext>
-            </a:extLst>
-          </p:cNvPr>
-          <p:cNvSpPr>
-            <a:spLocks noGrp="1"/>
-          </p:cNvSpPr>
-          <p:nvPr>
-            <p:ph type="sldNum" sz="quarter" idx="12"/>
-          </p:nvPr>
-        </p:nvSpPr>
-        <p:spPr/>
-        <p:txBody>
-          <a:bodyPr anchor="ctr">
-            <a:normAutofit/>
-          </a:bodyPr>
-          <a:lstStyle/>
-          <a:p>
-            <a:pPr>
-              <a:spcAft>
-                <a:spcPts val="600"/>
-              </a:spcAft>
-            </a:pPr>
-            <a:fld id="{5075537C-CA84-1446-933C-8E9D027F9201}" type="slidenum">
-              <a:rPr lang="en-US" smtClean="0"/>
-              <a:pPr>
-                <a:spcAft>
-                  <a:spcPts val="600"/>
-                </a:spcAft>
-              </a:pPr>
-              <a:t>3</a:t>
-            </a:fld>
-            <a:endParaRPr lang="en-US" dirty="0"/>
-          </a:p>
-        </p:txBody>
-      </p:sp>
-      <p:sp>
-        <p:nvSpPr>
           <p:cNvPr id="19" name="Title 1">
             <a:extLst>
               <a:ext uri="{FF2B5EF4-FFF2-40B4-BE49-F238E27FC236}">
@@ -11610,6 +12289,49 @@
               </a:rPr>
               <a:t>Currently, learners struggle to discover relevant courses due to the large volume of available content. This led to inefficient course selection and reduced engagement, ultimately affecting learning outcomes and platform effectiveness.</a:t>
             </a:r>
+          </a:p>
+        </p:txBody>
+      </p:sp>
+      <p:sp>
+        <p:nvSpPr>
+          <p:cNvPr id="2" name="Slide Number Placeholder 1">
+            <a:extLst>
+              <a:ext uri="{FF2B5EF4-FFF2-40B4-BE49-F238E27FC236}">
+                <a16:creationId xmlns:a16="http://schemas.microsoft.com/office/drawing/2014/main" id="{A2502EEF-B47A-ED2C-4705-812E3B08D9B9}"/>
+              </a:ext>
+            </a:extLst>
+          </p:cNvPr>
+          <p:cNvSpPr>
+            <a:spLocks noGrp="1"/>
+          </p:cNvSpPr>
+          <p:nvPr>
+            <p:ph type="sldNum" sz="quarter" idx="12"/>
+          </p:nvPr>
+        </p:nvSpPr>
+        <p:spPr/>
+        <p:txBody>
+          <a:bodyPr/>
+          <a:lstStyle/>
+          <a:p>
+            <a:fld id="{A190C97C-0095-2443-AC12-FA4CBA4ACD4D}" type="slidenum">
+              <a:rPr lang="en-US" dirty="0" smtClean="0">
+                <a:solidFill>
+                  <a:schemeClr val="accent4">
+                    <a:lumMod val="76000"/>
+                  </a:schemeClr>
+                </a:solidFill>
+                <a:latin typeface="Abadi"/>
+              </a:rPr>
+              <a:t>3</a:t>
+            </a:fld>
+            <a:endParaRPr lang="en-US" dirty="0">
+              <a:solidFill>
+                <a:schemeClr val="accent4">
+                  <a:lumMod val="76000"/>
+                </a:schemeClr>
+              </a:solidFill>
+              <a:latin typeface="Abadi"/>
+            </a:endParaRPr>
           </a:p>
         </p:txBody>
       </p:sp>
@@ -11707,7 +12429,7 @@
         </p:blipFill>
         <p:spPr>
           <a:xfrm>
-            <a:off x="10833055" y="5553777"/>
+            <a:off x="10091932" y="5512024"/>
             <a:ext cx="1028790" cy="1028790"/>
           </a:xfrm>
           <a:prstGeom prst="rect">
@@ -11715,6 +12437,49 @@
           </a:prstGeom>
         </p:spPr>
       </p:pic>
+      <p:sp>
+        <p:nvSpPr>
+          <p:cNvPr id="2" name="Slide Number Placeholder 1">
+            <a:extLst>
+              <a:ext uri="{FF2B5EF4-FFF2-40B4-BE49-F238E27FC236}">
+                <a16:creationId xmlns:a16="http://schemas.microsoft.com/office/drawing/2014/main" id="{72A9B8E7-6D90-B5C4-9212-A1088152E08A}"/>
+              </a:ext>
+            </a:extLst>
+          </p:cNvPr>
+          <p:cNvSpPr>
+            <a:spLocks noGrp="1"/>
+          </p:cNvSpPr>
+          <p:nvPr>
+            <p:ph type="sldNum" sz="quarter" idx="12"/>
+          </p:nvPr>
+        </p:nvSpPr>
+        <p:spPr/>
+        <p:txBody>
+          <a:bodyPr/>
+          <a:lstStyle/>
+          <a:p>
+            <a:fld id="{A190C97C-0095-2443-AC12-FA4CBA4ACD4D}" type="slidenum">
+              <a:rPr lang="en-US" dirty="0" smtClean="0">
+                <a:solidFill>
+                  <a:schemeClr val="accent4">
+                    <a:lumMod val="76000"/>
+                  </a:schemeClr>
+                </a:solidFill>
+                <a:latin typeface="Abadi"/>
+              </a:rPr>
+              <a:t>4</a:t>
+            </a:fld>
+            <a:endParaRPr lang="en-US" dirty="0">
+              <a:solidFill>
+                <a:schemeClr val="accent4">
+                  <a:lumMod val="76000"/>
+                </a:schemeClr>
+              </a:solidFill>
+              <a:latin typeface="Abadi"/>
+            </a:endParaRPr>
+          </a:p>
+        </p:txBody>
+      </p:sp>
     </p:spTree>
     <p:extLst>
       <p:ext uri="{BB962C8B-B14F-4D97-AF65-F5344CB8AC3E}">
@@ -12176,6 +12941,49 @@
           </a:prstGeom>
         </p:spPr>
       </p:pic>
+      <p:sp>
+        <p:nvSpPr>
+          <p:cNvPr id="3" name="Slide Number Placeholder 2">
+            <a:extLst>
+              <a:ext uri="{FF2B5EF4-FFF2-40B4-BE49-F238E27FC236}">
+                <a16:creationId xmlns:a16="http://schemas.microsoft.com/office/drawing/2014/main" id="{EEC4FFDA-9333-AF76-F1C1-0550E672494C}"/>
+              </a:ext>
+            </a:extLst>
+          </p:cNvPr>
+          <p:cNvSpPr>
+            <a:spLocks noGrp="1"/>
+          </p:cNvSpPr>
+          <p:nvPr>
+            <p:ph type="sldNum" sz="quarter" idx="12"/>
+          </p:nvPr>
+        </p:nvSpPr>
+        <p:spPr/>
+        <p:txBody>
+          <a:bodyPr/>
+          <a:lstStyle/>
+          <a:p>
+            <a:fld id="{A190C97C-0095-2443-AC12-FA4CBA4ACD4D}" type="slidenum">
+              <a:rPr lang="en-US" dirty="0" smtClean="0">
+                <a:solidFill>
+                  <a:schemeClr val="accent4">
+                    <a:lumMod val="76000"/>
+                  </a:schemeClr>
+                </a:solidFill>
+                <a:latin typeface="Abadi"/>
+              </a:rPr>
+              <a:t>5</a:t>
+            </a:fld>
+            <a:endParaRPr lang="en-US" dirty="0">
+              <a:solidFill>
+                <a:schemeClr val="accent4">
+                  <a:lumMod val="76000"/>
+                </a:schemeClr>
+              </a:solidFill>
+              <a:latin typeface="Abadi"/>
+            </a:endParaRPr>
+          </a:p>
+        </p:txBody>
+      </p:sp>
     </p:spTree>
     <p:extLst>
       <p:ext uri="{BB962C8B-B14F-4D97-AF65-F5344CB8AC3E}">
@@ -12592,6 +13400,49 @@
           </a:prstGeom>
         </p:spPr>
       </p:pic>
+      <p:sp>
+        <p:nvSpPr>
+          <p:cNvPr id="2" name="Slide Number Placeholder 1">
+            <a:extLst>
+              <a:ext uri="{FF2B5EF4-FFF2-40B4-BE49-F238E27FC236}">
+                <a16:creationId xmlns:a16="http://schemas.microsoft.com/office/drawing/2014/main" id="{1A78B284-0945-C88D-6837-5E30CF3395AE}"/>
+              </a:ext>
+            </a:extLst>
+          </p:cNvPr>
+          <p:cNvSpPr>
+            <a:spLocks noGrp="1"/>
+          </p:cNvSpPr>
+          <p:nvPr>
+            <p:ph type="sldNum" sz="quarter" idx="12"/>
+          </p:nvPr>
+        </p:nvSpPr>
+        <p:spPr/>
+        <p:txBody>
+          <a:bodyPr/>
+          <a:lstStyle/>
+          <a:p>
+            <a:fld id="{A190C97C-0095-2443-AC12-FA4CBA4ACD4D}" type="slidenum">
+              <a:rPr lang="en-US" dirty="0" smtClean="0">
+                <a:solidFill>
+                  <a:schemeClr val="accent4">
+                    <a:lumMod val="76000"/>
+                  </a:schemeClr>
+                </a:solidFill>
+                <a:latin typeface="Abadi"/>
+              </a:rPr>
+              <a:t>6</a:t>
+            </a:fld>
+            <a:endParaRPr lang="en-US" dirty="0">
+              <a:solidFill>
+                <a:schemeClr val="accent4">
+                  <a:lumMod val="76000"/>
+                </a:schemeClr>
+              </a:solidFill>
+              <a:latin typeface="Abadi"/>
+            </a:endParaRPr>
+          </a:p>
+        </p:txBody>
+      </p:sp>
     </p:spTree>
     <p:extLst>
       <p:ext uri="{BB962C8B-B14F-4D97-AF65-F5344CB8AC3E}">
@@ -12969,7 +13820,7 @@
         </p:blipFill>
         <p:spPr>
           <a:xfrm>
-            <a:off x="7922909" y="1193887"/>
+            <a:off x="7620197" y="1193887"/>
             <a:ext cx="3433827" cy="5190473"/>
           </a:xfrm>
           <a:prstGeom prst="rect">
@@ -12977,6 +13828,49 @@
           </a:prstGeom>
         </p:spPr>
       </p:pic>
+      <p:sp>
+        <p:nvSpPr>
+          <p:cNvPr id="2" name="Slide Number Placeholder 1">
+            <a:extLst>
+              <a:ext uri="{FF2B5EF4-FFF2-40B4-BE49-F238E27FC236}">
+                <a16:creationId xmlns:a16="http://schemas.microsoft.com/office/drawing/2014/main" id="{6DA4D400-59D3-2618-07E0-75EDC0BC65EB}"/>
+              </a:ext>
+            </a:extLst>
+          </p:cNvPr>
+          <p:cNvSpPr>
+            <a:spLocks noGrp="1"/>
+          </p:cNvSpPr>
+          <p:nvPr>
+            <p:ph type="sldNum" sz="quarter" idx="12"/>
+          </p:nvPr>
+        </p:nvSpPr>
+        <p:spPr/>
+        <p:txBody>
+          <a:bodyPr/>
+          <a:lstStyle/>
+          <a:p>
+            <a:fld id="{A190C97C-0095-2443-AC12-FA4CBA4ACD4D}" type="slidenum">
+              <a:rPr lang="en-US" dirty="0" smtClean="0">
+                <a:solidFill>
+                  <a:schemeClr val="accent4">
+                    <a:lumMod val="76000"/>
+                  </a:schemeClr>
+                </a:solidFill>
+                <a:latin typeface="Abadi"/>
+              </a:rPr>
+              <a:t>7</a:t>
+            </a:fld>
+            <a:endParaRPr lang="en-US" dirty="0">
+              <a:solidFill>
+                <a:schemeClr val="accent4">
+                  <a:lumMod val="76000"/>
+                </a:schemeClr>
+              </a:solidFill>
+              <a:latin typeface="Abadi"/>
+            </a:endParaRPr>
+          </a:p>
+        </p:txBody>
+      </p:sp>
     </p:spTree>
     <p:extLst>
       <p:ext uri="{BB962C8B-B14F-4D97-AF65-F5344CB8AC3E}">
@@ -13304,6 +14198,49 @@
               </a:rPr>
               <a:t>We can observe that words like data science, data, python and machine learning dominate, suggesting a strong focus on data-driven and AI related topics.</a:t>
             </a:r>
+          </a:p>
+        </p:txBody>
+      </p:sp>
+      <p:sp>
+        <p:nvSpPr>
+          <p:cNvPr id="2" name="Slide Number Placeholder 1">
+            <a:extLst>
+              <a:ext uri="{FF2B5EF4-FFF2-40B4-BE49-F238E27FC236}">
+                <a16:creationId xmlns:a16="http://schemas.microsoft.com/office/drawing/2014/main" id="{D8BE13C8-73EC-AF33-E4F2-3BE5322AEB8A}"/>
+              </a:ext>
+            </a:extLst>
+          </p:cNvPr>
+          <p:cNvSpPr>
+            <a:spLocks noGrp="1"/>
+          </p:cNvSpPr>
+          <p:nvPr>
+            <p:ph type="sldNum" sz="quarter" idx="12"/>
+          </p:nvPr>
+        </p:nvSpPr>
+        <p:spPr/>
+        <p:txBody>
+          <a:bodyPr/>
+          <a:lstStyle/>
+          <a:p>
+            <a:fld id="{A190C97C-0095-2443-AC12-FA4CBA4ACD4D}" type="slidenum">
+              <a:rPr lang="en-US" dirty="0" smtClean="0">
+                <a:solidFill>
+                  <a:schemeClr val="accent4">
+                    <a:lumMod val="76000"/>
+                  </a:schemeClr>
+                </a:solidFill>
+                <a:latin typeface="Abadi"/>
+              </a:rPr>
+              <a:t>8</a:t>
+            </a:fld>
+            <a:endParaRPr lang="en-US" dirty="0">
+              <a:solidFill>
+                <a:schemeClr val="accent4">
+                  <a:lumMod val="76000"/>
+                </a:schemeClr>
+              </a:solidFill>
+              <a:latin typeface="Abadi"/>
+            </a:endParaRPr>
           </a:p>
         </p:txBody>
       </p:sp>
@@ -14673,6 +15610,49 @@
           </p:txBody>
         </p:sp>
       </p:grpSp>
+      <p:sp>
+        <p:nvSpPr>
+          <p:cNvPr id="2" name="Slide Number Placeholder 1">
+            <a:extLst>
+              <a:ext uri="{FF2B5EF4-FFF2-40B4-BE49-F238E27FC236}">
+                <a16:creationId xmlns:a16="http://schemas.microsoft.com/office/drawing/2014/main" id="{5EE67E33-399B-7B39-A007-7E878FA935D4}"/>
+              </a:ext>
+            </a:extLst>
+          </p:cNvPr>
+          <p:cNvSpPr>
+            <a:spLocks noGrp="1"/>
+          </p:cNvSpPr>
+          <p:nvPr>
+            <p:ph type="sldNum" sz="quarter" idx="12"/>
+          </p:nvPr>
+        </p:nvSpPr>
+        <p:spPr/>
+        <p:txBody>
+          <a:bodyPr/>
+          <a:lstStyle/>
+          <a:p>
+            <a:fld id="{A190C97C-0095-2443-AC12-FA4CBA4ACD4D}" type="slidenum">
+              <a:rPr lang="en-US" dirty="0" smtClean="0">
+                <a:solidFill>
+                  <a:schemeClr val="accent4">
+                    <a:lumMod val="76000"/>
+                  </a:schemeClr>
+                </a:solidFill>
+                <a:latin typeface="Abadi"/>
+              </a:rPr>
+              <a:t>9</a:t>
+            </a:fld>
+            <a:endParaRPr lang="en-US" dirty="0">
+              <a:solidFill>
+                <a:schemeClr val="accent4">
+                  <a:lumMod val="76000"/>
+                </a:schemeClr>
+              </a:solidFill>
+              <a:latin typeface="Abadi"/>
+            </a:endParaRPr>
+          </a:p>
+        </p:txBody>
+      </p:sp>
     </p:spTree>
     <p:extLst>
       <p:ext uri="{BB962C8B-B14F-4D97-AF65-F5344CB8AC3E}">
@@ -15647,18 +16627,18 @@
 </file>
 
 <file path=customXml/item1.xml><?xml version="1.0" encoding="utf-8"?>
+<p:properties xmlns:p="http://schemas.microsoft.com/office/2006/metadata/properties" xmlns:xsi="http://www.w3.org/2001/XMLSchema-instance" xmlns:pc="http://schemas.microsoft.com/office/infopath/2007/PartnerControls">
+  <documentManagement/>
+</p:properties>
+</file>
+
+<file path=customXml/item2.xml><?xml version="1.0" encoding="utf-8"?>
 <?mso-contentType ?>
 <FormTemplates xmlns="http://schemas.microsoft.com/sharepoint/v3/contenttype/forms">
   <Display>DocumentLibraryForm</Display>
   <Edit>DocumentLibraryForm</Edit>
   <New>DocumentLibraryForm</New>
 </FormTemplates>
-</file>
-
-<file path=customXml/item2.xml><?xml version="1.0" encoding="utf-8"?>
-<p:properties xmlns:p="http://schemas.microsoft.com/office/2006/metadata/properties" xmlns:xsi="http://www.w3.org/2001/XMLSchema-instance" xmlns:pc="http://schemas.microsoft.com/office/infopath/2007/PartnerControls">
-  <documentManagement/>
-</p:properties>
 </file>
 
 <file path=customXml/item3.xml><?xml version="1.0" encoding="utf-8"?>
@@ -15879,14 +16859,6 @@
 </file>
 
 <file path=customXml/itemProps1.xml><?xml version="1.0" encoding="utf-8"?>
-<ds:datastoreItem xmlns:ds="http://schemas.openxmlformats.org/officeDocument/2006/customXml" ds:itemID="{7EFDA260-DDA0-422C-B7AE-778F653FBB36}">
-  <ds:schemaRefs>
-    <ds:schemaRef ds:uri="http://schemas.microsoft.com/sharepoint/v3/contenttype/forms"/>
-  </ds:schemaRefs>
-</ds:datastoreItem>
-</file>
-
-<file path=customXml/itemProps2.xml><?xml version="1.0" encoding="utf-8"?>
 <ds:datastoreItem xmlns:ds="http://schemas.openxmlformats.org/officeDocument/2006/customXml" ds:itemID="{54DA07C5-A406-4A0D-B3E6-3856C94AC7F3}">
   <ds:schemaRefs>
     <ds:schemaRef ds:uri="http://purl.org/dc/dcmitype/"/>
@@ -15899,6 +16871,14 @@
     <ds:schemaRef ds:uri="http://schemas.openxmlformats.org/package/2006/metadata/core-properties"/>
     <ds:schemaRef ds:uri="155be751-a274-42e8-93fb-f39d3b9bccc8"/>
     <ds:schemaRef ds:uri="http://purl.org/dc/terms/"/>
+  </ds:schemaRefs>
+</ds:datastoreItem>
+</file>
+
+<file path=customXml/itemProps2.xml><?xml version="1.0" encoding="utf-8"?>
+<ds:datastoreItem xmlns:ds="http://schemas.openxmlformats.org/officeDocument/2006/customXml" ds:itemID="{7EFDA260-DDA0-422C-B7AE-778F653FBB36}">
+  <ds:schemaRefs>
+    <ds:schemaRef ds:uri="http://schemas.microsoft.com/sharepoint/v3/contenttype/forms"/>
   </ds:schemaRefs>
 </ds:datastoreItem>
 </file>
